--- a/examples/patterns/talk.pptx
+++ b/examples/patterns/talk.pptx
@@ -1215,7 +1215,7 @@
         </p:nvSpPr>
         <p:spPr>
           <a:xfrm>
-            <a:off x="11074400" y="5867400"/>
+            <a:off x="11074400" y="6172200"/>
             <a:ext cx="508000" cy="203200"/>
           </a:xfrm>
           <a:prstGeom prst="rect">
@@ -1337,7 +1337,7 @@
         </p:nvSpPr>
         <p:spPr>
           <a:xfrm>
-            <a:off x="11074400" y="5867400"/>
+            <a:off x="11074400" y="6172200"/>
             <a:ext cx="508000" cy="203200"/>
           </a:xfrm>
           <a:prstGeom prst="rect">
@@ -1558,7 +1558,7 @@
         </p:nvSpPr>
         <p:spPr>
           <a:xfrm>
-            <a:off x="11074400" y="5867400"/>
+            <a:off x="11074400" y="6172200"/>
             <a:ext cx="508000" cy="203200"/>
           </a:xfrm>
           <a:prstGeom prst="rect">
@@ -2050,8 +2050,8 @@
         </p:nvSpPr>
         <p:spPr>
           <a:xfrm>
-            <a:off x="609600" y="5664200"/>
-            <a:ext cx="8890000" cy="228600"/>
+            <a:off x="609600" y="5969000"/>
+            <a:ext cx="8890000" cy="203200"/>
           </a:xfrm>
           <a:prstGeom prst="rect">
             <a:avLst/>
@@ -2093,7 +2093,7 @@
         </p:nvSpPr>
         <p:spPr>
           <a:xfrm>
-            <a:off x="11074400" y="5867400"/>
+            <a:off x="11074400" y="6172200"/>
             <a:ext cx="508000" cy="203200"/>
           </a:xfrm>
           <a:prstGeom prst="rect">
@@ -2281,8 +2281,8 @@
         </p:nvSpPr>
         <p:spPr>
           <a:xfrm>
-            <a:off x="609600" y="5664200"/>
-            <a:ext cx="8890000" cy="228600"/>
+            <a:off x="609600" y="5969000"/>
+            <a:ext cx="8890000" cy="203200"/>
           </a:xfrm>
           <a:prstGeom prst="rect">
             <a:avLst/>
@@ -2324,7 +2324,7 @@
         </p:nvSpPr>
         <p:spPr>
           <a:xfrm>
-            <a:off x="11074400" y="5867400"/>
+            <a:off x="11074400" y="6172200"/>
             <a:ext cx="508000" cy="203200"/>
           </a:xfrm>
           <a:prstGeom prst="rect">
